--- a/slides/ch11-professionalism-teamwork-meetings.pptx
+++ b/slides/ch11-professionalism-teamwork-meetings.pptx
@@ -5813,7 +5813,7 @@
                 </a:solidFill>
                 <a:latin typeface="Calibri"/>
               </a:rPr>
-              <a:t>BADM 225 · Chapter 11</a:t>
+              <a:t>BADM 225 · Chapter 11  ·  © Derek D. Bussan</a:t>
             </a:r>
           </a:p>
         </p:txBody>
@@ -6100,7 +6100,7 @@
                 </a:solidFill>
                 <a:latin typeface="Calibri"/>
               </a:rPr>
-              <a:t>BADM 225 · Chapter 11</a:t>
+              <a:t>BADM 225 · Chapter 11  ·  © Derek D. Bussan</a:t>
             </a:r>
           </a:p>
         </p:txBody>
@@ -6660,7 +6660,7 @@
                 </a:solidFill>
                 <a:latin typeface="Calibri"/>
               </a:rPr>
-              <a:t>BADM 225 · Chapter 11</a:t>
+              <a:t>BADM 225 · Chapter 11  ·  © Derek D. Bussan</a:t>
             </a:r>
           </a:p>
         </p:txBody>
@@ -7025,7 +7025,7 @@
                 </a:solidFill>
                 <a:latin typeface="Calibri"/>
               </a:rPr>
-              <a:t>BADM 225 · Chapter 11</a:t>
+              <a:t>BADM 225 · Chapter 11  ·  © Derek D. Bussan</a:t>
             </a:r>
           </a:p>
         </p:txBody>
@@ -7153,7 +7153,7 @@
                 </a:solidFill>
                 <a:latin typeface="Calibri"/>
               </a:rPr>
-              <a:t>BADM 225 · Chapter 11</a:t>
+              <a:t>BADM 225 · Chapter 11  ·  © Derek D. Bussan</a:t>
             </a:r>
           </a:p>
         </p:txBody>
@@ -7479,7 +7479,7 @@
                 </a:solidFill>
                 <a:latin typeface="Calibri"/>
               </a:rPr>
-              <a:t>BADM 225 · Chapter 11</a:t>
+              <a:t>BADM 225 · Chapter 11  ·  © Derek D. Bussan</a:t>
             </a:r>
           </a:p>
         </p:txBody>
@@ -8133,7 +8133,7 @@
                 </a:solidFill>
                 <a:latin typeface="Calibri"/>
               </a:rPr>
-              <a:t>BADM 225 · Chapter 11</a:t>
+              <a:t>BADM 225 · Chapter 11  ·  © Derek D. Bussan</a:t>
             </a:r>
           </a:p>
         </p:txBody>
@@ -8454,7 +8454,7 @@
                 </a:solidFill>
                 <a:latin typeface="Calibri"/>
               </a:rPr>
-              <a:t>BADM 225 · Chapter 11</a:t>
+              <a:t>BADM 225 · Chapter 11  ·  © Derek D. Bussan</a:t>
             </a:r>
           </a:p>
         </p:txBody>
@@ -8741,7 +8741,7 @@
                 </a:solidFill>
                 <a:latin typeface="Calibri"/>
               </a:rPr>
-              <a:t>BADM 225 · Chapter 11</a:t>
+              <a:t>BADM 225 · Chapter 11  ·  © Derek D. Bussan</a:t>
             </a:r>
           </a:p>
         </p:txBody>
@@ -9192,7 +9192,7 @@
                 </a:solidFill>
                 <a:latin typeface="Calibri"/>
               </a:rPr>
-              <a:t>BADM 225 · Chapter 11</a:t>
+              <a:t>BADM 225 · Chapter 11  ·  © Derek D. Bussan</a:t>
             </a:r>
           </a:p>
         </p:txBody>
@@ -9479,7 +9479,7 @@
                 </a:solidFill>
                 <a:latin typeface="Calibri"/>
               </a:rPr>
-              <a:t>BADM 225 · Chapter 11</a:t>
+              <a:t>BADM 225 · Chapter 11  ·  © Derek D. Bussan</a:t>
             </a:r>
           </a:p>
         </p:txBody>
@@ -9800,7 +9800,7 @@
                 </a:solidFill>
                 <a:latin typeface="Calibri"/>
               </a:rPr>
-              <a:t>BADM 225 · Chapter 11</a:t>
+              <a:t>BADM 225 · Chapter 11  ·  © Derek D. Bussan</a:t>
             </a:r>
           </a:p>
         </p:txBody>
@@ -10165,7 +10165,7 @@
                 </a:solidFill>
                 <a:latin typeface="Calibri"/>
               </a:rPr>
-              <a:t>BADM 225 · Chapter 11</a:t>
+              <a:t>BADM 225 · Chapter 11  ·  © Derek D. Bussan</a:t>
             </a:r>
           </a:p>
         </p:txBody>
@@ -10293,7 +10293,7 @@
                 </a:solidFill>
                 <a:latin typeface="Calibri"/>
               </a:rPr>
-              <a:t>BADM 225 · Chapter 11</a:t>
+              <a:t>BADM 225 · Chapter 11  ·  © Derek D. Bussan</a:t>
             </a:r>
           </a:p>
         </p:txBody>
@@ -10580,7 +10580,7 @@
                 </a:solidFill>
                 <a:latin typeface="Calibri"/>
               </a:rPr>
-              <a:t>BADM 225 · Chapter 11</a:t>
+              <a:t>BADM 225 · Chapter 11  ·  © Derek D. Bussan</a:t>
             </a:r>
           </a:p>
         </p:txBody>
@@ -10867,7 +10867,7 @@
                 </a:solidFill>
                 <a:latin typeface="Calibri"/>
               </a:rPr>
-              <a:t>BADM 225 · Chapter 11</a:t>
+              <a:t>BADM 225 · Chapter 11  ·  © Derek D. Bussan</a:t>
             </a:r>
           </a:p>
         </p:txBody>
@@ -11154,7 +11154,7 @@
                 </a:solidFill>
                 <a:latin typeface="Calibri"/>
               </a:rPr>
-              <a:t>BADM 225 · Chapter 11</a:t>
+              <a:t>BADM 225 · Chapter 11  ·  © Derek D. Bussan</a:t>
             </a:r>
           </a:p>
         </p:txBody>
@@ -11441,7 +11441,7 @@
                 </a:solidFill>
                 <a:latin typeface="Calibri"/>
               </a:rPr>
-              <a:t>BADM 225 · Chapter 11</a:t>
+              <a:t>BADM 225 · Chapter 11  ·  © Derek D. Bussan</a:t>
             </a:r>
           </a:p>
         </p:txBody>
@@ -11728,7 +11728,7 @@
                 </a:solidFill>
                 <a:latin typeface="Calibri"/>
               </a:rPr>
-              <a:t>BADM 225 · Chapter 11</a:t>
+              <a:t>BADM 225 · Chapter 11  ·  © Derek D. Bussan</a:t>
             </a:r>
           </a:p>
         </p:txBody>
@@ -12543,7 +12543,7 @@
                 </a:solidFill>
                 <a:latin typeface="Calibri"/>
               </a:rPr>
-              <a:t>BADM 225 · Chapter 11</a:t>
+              <a:t>BADM 225 · Chapter 11  ·  © Derek D. Bussan</a:t>
             </a:r>
           </a:p>
         </p:txBody>
@@ -12819,7 +12819,7 @@
                 </a:solidFill>
                 <a:latin typeface="Calibri"/>
               </a:rPr>
-              <a:t>BADM 225 · Chapter 11</a:t>
+              <a:t>BADM 225 · Chapter 11  ·  © Derek D. Bussan</a:t>
             </a:r>
           </a:p>
         </p:txBody>
@@ -12990,7 +12990,7 @@
                 </a:solidFill>
                 <a:latin typeface="Calibri"/>
               </a:rPr>
-              <a:t>BADM 225 · Chapter 11</a:t>
+              <a:t>BADM 225 · Chapter 11  ·  © Derek D. Bussan</a:t>
             </a:r>
           </a:p>
         </p:txBody>
@@ -13118,7 +13118,7 @@
                 </a:solidFill>
                 <a:latin typeface="Calibri"/>
               </a:rPr>
-              <a:t>BADM 225 · Chapter 11</a:t>
+              <a:t>BADM 225 · Chapter 11  ·  © Derek D. Bussan</a:t>
             </a:r>
           </a:p>
         </p:txBody>
@@ -13439,7 +13439,7 @@
                 </a:solidFill>
                 <a:latin typeface="Calibri"/>
               </a:rPr>
-              <a:t>BADM 225 · Chapter 11</a:t>
+              <a:t>BADM 225 · Chapter 11  ·  © Derek D. Bussan</a:t>
             </a:r>
           </a:p>
         </p:txBody>
@@ -14107,7 +14107,7 @@
                 </a:solidFill>
                 <a:latin typeface="Calibri"/>
               </a:rPr>
-              <a:t>BADM 225 · Chapter 11</a:t>
+              <a:t>BADM 225 · Chapter 11  ·  © Derek D. Bussan</a:t>
             </a:r>
           </a:p>
         </p:txBody>
@@ -14394,7 +14394,7 @@
                 </a:solidFill>
                 <a:latin typeface="Calibri"/>
               </a:rPr>
-              <a:t>BADM 225 · Chapter 11</a:t>
+              <a:t>BADM 225 · Chapter 11  ·  © Derek D. Bussan</a:t>
             </a:r>
           </a:p>
         </p:txBody>
@@ -14759,7 +14759,7 @@
                 </a:solidFill>
                 <a:latin typeface="Calibri"/>
               </a:rPr>
-              <a:t>BADM 225 · Chapter 11</a:t>
+              <a:t>BADM 225 · Chapter 11  ·  © Derek D. Bussan</a:t>
             </a:r>
           </a:p>
         </p:txBody>
@@ -14887,7 +14887,7 @@
                 </a:solidFill>
                 <a:latin typeface="Calibri"/>
               </a:rPr>
-              <a:t>BADM 225 · Chapter 11</a:t>
+              <a:t>BADM 225 · Chapter 11  ·  © Derek D. Bussan</a:t>
             </a:r>
           </a:p>
         </p:txBody>
@@ -15174,7 +15174,7 @@
                 </a:solidFill>
                 <a:latin typeface="Calibri"/>
               </a:rPr>
-              <a:t>BADM 225 · Chapter 11</a:t>
+              <a:t>BADM 225 · Chapter 11  ·  © Derek D. Bussan</a:t>
             </a:r>
           </a:p>
         </p:txBody>

--- a/slides/ch11-professionalism-teamwork-meetings.pptx
+++ b/slides/ch11-professionalism-teamwork-meetings.pptx
@@ -5720,7 +5720,7 @@
                 </a:solidFill>
                 <a:latin typeface="Calibri"/>
               </a:rPr>
-              <a:t>BADM 225 · Chapter 11  ·  Original instructional material — no publisher content</a:t>
+              <a:t>BADM 225 · Chapter 11  ·  Original material © 2026 Derek D. Bussan, PhD, MBA  ·  No publisher content</a:t>
             </a:r>
           </a:p>
         </p:txBody>
